--- a/instructor/slides/pptx/tutorials/04-objects-nulls-and-selectors/04-skipnullon-and-writer-properties.pptx
+++ b/instructor/slides/pptx/tutorials/04-objects-nulls-and-selectors/04-skipnullon-and-writer-properties.pptx
@@ -3668,8 +3668,8 @@
         </p:nvSpPr>
         <p:spPr>
           <a:xfrm>
-            <a:off x="640080" y="1920240"/>
-            <a:ext cx="10972800" cy="1463040"/>
+            <a:off x="640080" y="1828800"/>
+            <a:ext cx="6675120" cy="1645920"/>
           </a:xfrm>
           <a:prstGeom prst="rect">
             <a:avLst/>
@@ -3683,7 +3683,7 @@
           <a:lstStyle/>
           <a:p>
             <a:r>
-              <a:rPr sz="4400" b="1">
+              <a:rPr sz="4000" b="1">
                 <a:solidFill>
                   <a:srgbClr val="FFFFFF"/>
                 </a:solidFill>
@@ -3702,8 +3702,8 @@
         </p:nvSpPr>
         <p:spPr>
           <a:xfrm>
-            <a:off x="640080" y="3657600"/>
-            <a:ext cx="10789920" cy="1097280"/>
+            <a:off x="640080" y="3794760"/>
+            <a:ext cx="6675120" cy="1097280"/>
           </a:xfrm>
           <a:prstGeom prst="rect">
             <a:avLst/>
@@ -3717,7 +3717,7 @@
           <a:lstStyle/>
           <a:p>
             <a:r>
-              <a:rPr sz="2000" b="0">
+              <a:rPr sz="1800" b="0">
                 <a:solidFill>
                   <a:srgbClr val="B7CBDE"/>
                 </a:solidFill>
@@ -3728,6 +3728,30 @@
           </a:p>
         </p:txBody>
       </p:sp>
+      <p:pic>
+        <p:nvPicPr>
+          <p:cNvPr id="6" name="Picture 5" descr="dw-objects.jpg"/>
+          <p:cNvPicPr>
+            <a:picLocks noChangeAspect="1"/>
+          </p:cNvPicPr>
+          <p:nvPr/>
+        </p:nvPicPr>
+        <p:blipFill>
+          <a:blip r:embed="rId2"/>
+          <a:stretch>
+            <a:fillRect/>
+          </a:stretch>
+        </p:blipFill>
+        <p:spPr>
+          <a:xfrm>
+            <a:off x="7452360" y="1325880"/>
+            <a:ext cx="4160520" cy="4160520"/>
+          </a:xfrm>
+          <a:prstGeom prst="rect">
+            <a:avLst/>
+          </a:prstGeom>
+        </p:spPr>
+      </p:pic>
     </p:spTree>
   </p:cSld>
   <p:clrMapOvr>
@@ -3831,8 +3855,8 @@
         </p:nvSpPr>
         <p:spPr>
           <a:xfrm>
-            <a:off x="640080" y="685800"/>
-            <a:ext cx="10972800" cy="1463040"/>
+            <a:off x="640080" y="658368"/>
+            <a:ext cx="7863840" cy="1645920"/>
           </a:xfrm>
           <a:prstGeom prst="rect">
             <a:avLst/>
@@ -3846,7 +3870,7 @@
           <a:lstStyle/>
           <a:p>
             <a:r>
-              <a:rPr sz="3200" b="1">
+              <a:rPr sz="3000" b="1">
                 <a:solidFill>
                   <a:srgbClr val="FFFFFF"/>
                 </a:solidFill>
@@ -3865,8 +3889,8 @@
         </p:nvSpPr>
         <p:spPr>
           <a:xfrm>
-            <a:off x="777240" y="2286000"/>
-            <a:ext cx="10607040" cy="4754880"/>
+            <a:off x="777240" y="2331720"/>
+            <a:ext cx="7498079" cy="4754880"/>
           </a:xfrm>
           <a:prstGeom prst="rect">
             <a:avLst/>
@@ -3885,7 +3909,7 @@
               </a:spcAft>
             </a:pPr>
             <a:r>
-              <a:rPr sz="2400" b="0">
+              <a:rPr sz="2200" b="0">
                 <a:solidFill>
                   <a:srgbClr val="FFFFFF"/>
                 </a:solidFill>
@@ -3896,6 +3920,30 @@
           </a:p>
         </p:txBody>
       </p:sp>
+      <p:pic>
+        <p:nvPicPr>
+          <p:cNvPr id="6" name="Picture 5" descr="dw-objects.jpg"/>
+          <p:cNvPicPr>
+            <a:picLocks noChangeAspect="1"/>
+          </p:cNvPicPr>
+          <p:nvPr/>
+        </p:nvPicPr>
+        <p:blipFill>
+          <a:blip r:embed="rId2"/>
+          <a:stretch>
+            <a:fillRect/>
+          </a:stretch>
+        </p:blipFill>
+        <p:spPr>
+          <a:xfrm>
+            <a:off x="8732520" y="2057400"/>
+            <a:ext cx="2880360" cy="2880360"/>
+          </a:xfrm>
+          <a:prstGeom prst="rect">
+            <a:avLst/>
+          </a:prstGeom>
+        </p:spPr>
+      </p:pic>
     </p:spTree>
   </p:cSld>
   <p:clrMapOvr>
@@ -3999,8 +4047,8 @@
         </p:nvSpPr>
         <p:spPr>
           <a:xfrm>
-            <a:off x="640080" y="685800"/>
-            <a:ext cx="10972800" cy="1463040"/>
+            <a:off x="640080" y="658368"/>
+            <a:ext cx="7863840" cy="1645920"/>
           </a:xfrm>
           <a:prstGeom prst="rect">
             <a:avLst/>
@@ -4014,7 +4062,7 @@
           <a:lstStyle/>
           <a:p>
             <a:r>
-              <a:rPr sz="3200" b="1">
+              <a:rPr sz="3000" b="1">
                 <a:solidFill>
                   <a:srgbClr val="FFFFFF"/>
                 </a:solidFill>
@@ -4033,8 +4081,8 @@
         </p:nvSpPr>
         <p:spPr>
           <a:xfrm>
-            <a:off x="777240" y="2286000"/>
-            <a:ext cx="10607040" cy="4754880"/>
+            <a:off x="777240" y="2331720"/>
+            <a:ext cx="7498079" cy="4754880"/>
           </a:xfrm>
           <a:prstGeom prst="rect">
             <a:avLst/>
@@ -4053,7 +4101,7 @@
               </a:spcAft>
             </a:pPr>
             <a:r>
-              <a:rPr sz="2400" b="0">
+              <a:rPr sz="2200" b="0">
                 <a:solidFill>
                   <a:srgbClr val="FFFFFF"/>
                 </a:solidFill>
@@ -4064,6 +4112,30 @@
           </a:p>
         </p:txBody>
       </p:sp>
+      <p:pic>
+        <p:nvPicPr>
+          <p:cNvPr id="6" name="Picture 5" descr="dw-objects.jpg"/>
+          <p:cNvPicPr>
+            <a:picLocks noChangeAspect="1"/>
+          </p:cNvPicPr>
+          <p:nvPr/>
+        </p:nvPicPr>
+        <p:blipFill>
+          <a:blip r:embed="rId2"/>
+          <a:stretch>
+            <a:fillRect/>
+          </a:stretch>
+        </p:blipFill>
+        <p:spPr>
+          <a:xfrm>
+            <a:off x="8732520" y="2057400"/>
+            <a:ext cx="2880360" cy="2880360"/>
+          </a:xfrm>
+          <a:prstGeom prst="rect">
+            <a:avLst/>
+          </a:prstGeom>
+        </p:spPr>
+      </p:pic>
     </p:spTree>
   </p:cSld>
   <p:clrMapOvr>
@@ -4167,8 +4239,8 @@
         </p:nvSpPr>
         <p:spPr>
           <a:xfrm>
-            <a:off x="640080" y="685800"/>
-            <a:ext cx="10972800" cy="1463040"/>
+            <a:off x="640080" y="658368"/>
+            <a:ext cx="7863840" cy="1645920"/>
           </a:xfrm>
           <a:prstGeom prst="rect">
             <a:avLst/>
@@ -4182,7 +4254,7 @@
           <a:lstStyle/>
           <a:p>
             <a:r>
-              <a:rPr sz="3200" b="1">
+              <a:rPr sz="3000" b="1">
                 <a:solidFill>
                   <a:srgbClr val="FFFFFF"/>
                 </a:solidFill>
@@ -4201,8 +4273,8 @@
         </p:nvSpPr>
         <p:spPr>
           <a:xfrm>
-            <a:off x="777240" y="2286000"/>
-            <a:ext cx="10607040" cy="4754880"/>
+            <a:off x="777240" y="2331720"/>
+            <a:ext cx="7498079" cy="4754880"/>
           </a:xfrm>
           <a:prstGeom prst="rect">
             <a:avLst/>
@@ -4221,7 +4293,7 @@
               </a:spcAft>
             </a:pPr>
             <a:r>
-              <a:rPr sz="2400" b="0">
+              <a:rPr sz="2200" b="0">
                 <a:solidFill>
                   <a:srgbClr val="FFFFFF"/>
                 </a:solidFill>
@@ -4232,6 +4304,30 @@
           </a:p>
         </p:txBody>
       </p:sp>
+      <p:pic>
+        <p:nvPicPr>
+          <p:cNvPr id="6" name="Picture 5" descr="dw-objects.jpg"/>
+          <p:cNvPicPr>
+            <a:picLocks noChangeAspect="1"/>
+          </p:cNvPicPr>
+          <p:nvPr/>
+        </p:nvPicPr>
+        <p:blipFill>
+          <a:blip r:embed="rId2"/>
+          <a:stretch>
+            <a:fillRect/>
+          </a:stretch>
+        </p:blipFill>
+        <p:spPr>
+          <a:xfrm>
+            <a:off x="8732520" y="2057400"/>
+            <a:ext cx="2880360" cy="2880360"/>
+          </a:xfrm>
+          <a:prstGeom prst="rect">
+            <a:avLst/>
+          </a:prstGeom>
+        </p:spPr>
+      </p:pic>
     </p:spTree>
   </p:cSld>
   <p:clrMapOvr>
@@ -4335,8 +4431,8 @@
         </p:nvSpPr>
         <p:spPr>
           <a:xfrm>
-            <a:off x="640080" y="685800"/>
-            <a:ext cx="10972800" cy="1463040"/>
+            <a:off x="640080" y="658368"/>
+            <a:ext cx="10972800" cy="1645920"/>
           </a:xfrm>
           <a:prstGeom prst="rect">
             <a:avLst/>
@@ -4350,7 +4446,7 @@
           <a:lstStyle/>
           <a:p>
             <a:r>
-              <a:rPr sz="3200" b="1">
+              <a:rPr sz="3000" b="1">
                 <a:solidFill>
                   <a:srgbClr val="FFFFFF"/>
                 </a:solidFill>
@@ -4568,8 +4664,8 @@
         </p:nvSpPr>
         <p:spPr>
           <a:xfrm>
-            <a:off x="640080" y="685800"/>
-            <a:ext cx="10972800" cy="1463040"/>
+            <a:off x="640080" y="658368"/>
+            <a:ext cx="7863840" cy="1645920"/>
           </a:xfrm>
           <a:prstGeom prst="rect">
             <a:avLst/>
@@ -4583,7 +4679,7 @@
           <a:lstStyle/>
           <a:p>
             <a:r>
-              <a:rPr sz="3200" b="1">
+              <a:rPr sz="3000" b="1">
                 <a:solidFill>
                   <a:srgbClr val="FFFFFF"/>
                 </a:solidFill>
@@ -4602,8 +4698,8 @@
         </p:nvSpPr>
         <p:spPr>
           <a:xfrm>
-            <a:off x="777240" y="2286000"/>
-            <a:ext cx="10607040" cy="4754880"/>
+            <a:off x="777240" y="2331720"/>
+            <a:ext cx="7498079" cy="4754880"/>
           </a:xfrm>
           <a:prstGeom prst="rect">
             <a:avLst/>
@@ -4622,7 +4718,7 @@
               </a:spcAft>
             </a:pPr>
             <a:r>
-              <a:rPr sz="2400" b="0">
+              <a:rPr sz="2200" b="0">
                 <a:solidFill>
                   <a:srgbClr val="FFFFFF"/>
                 </a:solidFill>
@@ -4638,7 +4734,7 @@
               </a:spcAft>
             </a:pPr>
             <a:r>
-              <a:rPr sz="2400" b="0">
+              <a:rPr sz="2200" b="0">
                 <a:solidFill>
                   <a:srgbClr val="FFFFFF"/>
                 </a:solidFill>
@@ -4649,6 +4745,30 @@
           </a:p>
         </p:txBody>
       </p:sp>
+      <p:pic>
+        <p:nvPicPr>
+          <p:cNvPr id="6" name="Picture 5" descr="dw-objects.jpg"/>
+          <p:cNvPicPr>
+            <a:picLocks noChangeAspect="1"/>
+          </p:cNvPicPr>
+          <p:nvPr/>
+        </p:nvPicPr>
+        <p:blipFill>
+          <a:blip r:embed="rId2"/>
+          <a:stretch>
+            <a:fillRect/>
+          </a:stretch>
+        </p:blipFill>
+        <p:spPr>
+          <a:xfrm>
+            <a:off x="8732520" y="2057400"/>
+            <a:ext cx="2880360" cy="2880360"/>
+          </a:xfrm>
+          <a:prstGeom prst="rect">
+            <a:avLst/>
+          </a:prstGeom>
+        </p:spPr>
+      </p:pic>
     </p:spTree>
   </p:cSld>
   <p:clrMapOvr>
